--- a/HEART_Lab_AI_Curriculum.pptx
+++ b/HEART_Lab_AI_Curriculum.pptx
@@ -5,19 +5,19 @@
     <p:sldMasterId id="2147483648" r:id="rId1"/>
   </p:sldMasterIdLst>
   <p:sldIdLst>
-    <p:sldId id="256" r:id="rId7"/>
-    <p:sldId id="257" r:id="rId8"/>
-    <p:sldId id="258" r:id="rId9"/>
-    <p:sldId id="259" r:id="rId10"/>
-    <p:sldId id="260" r:id="rId11"/>
-    <p:sldId id="261" r:id="rId12"/>
-    <p:sldId id="262" r:id="rId13"/>
-    <p:sldId id="263" r:id="rId14"/>
-    <p:sldId id="264" r:id="rId15"/>
-    <p:sldId id="265" r:id="rId16"/>
-    <p:sldId id="266" r:id="rId17"/>
+    <p:sldId id="256" r:id="rId2"/>
+    <p:sldId id="257" r:id="rId3"/>
+    <p:sldId id="258" r:id="rId4"/>
+    <p:sldId id="259" r:id="rId5"/>
+    <p:sldId id="260" r:id="rId6"/>
+    <p:sldId id="261" r:id="rId7"/>
+    <p:sldId id="262" r:id="rId8"/>
+    <p:sldId id="263" r:id="rId9"/>
+    <p:sldId id="264" r:id="rId10"/>
+    <p:sldId id="265" r:id="rId11"/>
+    <p:sldId id="266" r:id="rId12"/>
   </p:sldIdLst>
-  <p:sldSz cx="12191695" cy="6858000" type="screen4x3"/>
+  <p:sldSz cx="12192000" cy="6858000"/>
   <p:notesSz cx="6858000" cy="9144000"/>
   <p:defaultTextStyle>
     <a:defPPr>
@@ -114,6 +114,22 @@
       </a:defRPr>
     </a:lvl9pPr>
   </p:defaultTextStyle>
+  <p:extLst>
+    <p:ext uri="{EFAFB233-063F-42B5-8137-9DF3F51BA10A}">
+      <p15:sldGuideLst xmlns:p15="http://schemas.microsoft.com/office/powerpoint/2012/main">
+        <p15:guide id="1" orient="horz" pos="2160">
+          <p15:clr>
+            <a:srgbClr val="A4A3A4"/>
+          </p15:clr>
+        </p15:guide>
+        <p15:guide id="2" pos="2880">
+          <p15:clr>
+            <a:srgbClr val="A4A3A4"/>
+          </p15:clr>
+        </p15:guide>
+      </p15:sldGuideLst>
+    </p:ext>
+  </p:extLst>
 </p:presentation>
 </file>
 
@@ -155,10 +171,9 @@
           <a:lstStyle/>
           <a:p>
             <a:r>
-              <a:rPr lang="en-US" smtClean="0"/>
+              <a:rPr lang="en-US"/>
               <a:t>Click to edit Master title style</a:t>
             </a:r>
-            <a:endParaRPr lang="en-US"/>
           </a:p>
         </p:txBody>
       </p:sp>
@@ -274,10 +289,9 @@
           </a:lstStyle>
           <a:p>
             <a:r>
-              <a:rPr lang="en-US" smtClean="0"/>
+              <a:rPr lang="en-US"/>
               <a:t>Click to edit Master subtitle style</a:t>
             </a:r>
-            <a:endParaRPr lang="en-US"/>
           </a:p>
         </p:txBody>
       </p:sp>
@@ -298,7 +312,7 @@
           <a:p>
             <a:fld id="{5BCAD085-E8A6-8845-BD4E-CB4CCA059FC4}" type="datetimeFigureOut">
               <a:rPr lang="en-US" smtClean="0"/>
-              <a:t>1/27/13</a:t>
+              <a:t>3/18/2026</a:t>
             </a:fld>
             <a:endParaRPr lang="en-US"/>
           </a:p>
@@ -392,10 +406,9 @@
           <a:lstStyle/>
           <a:p>
             <a:r>
-              <a:rPr lang="en-US" smtClean="0"/>
+              <a:rPr lang="en-US"/>
               <a:t>Click to edit Master title style</a:t>
             </a:r>
-            <a:endParaRPr lang="en-US"/>
           </a:p>
         </p:txBody>
       </p:sp>
@@ -416,38 +429,37 @@
           <a:p>
             <a:pPr lvl="0"/>
             <a:r>
-              <a:rPr lang="en-US" smtClean="0"/>
+              <a:rPr lang="en-US"/>
               <a:t>Click to edit Master text styles</a:t>
             </a:r>
           </a:p>
           <a:p>
             <a:pPr lvl="1"/>
             <a:r>
-              <a:rPr lang="en-US" smtClean="0"/>
+              <a:rPr lang="en-US"/>
               <a:t>Second level</a:t>
             </a:r>
           </a:p>
           <a:p>
             <a:pPr lvl="2"/>
             <a:r>
-              <a:rPr lang="en-US" smtClean="0"/>
+              <a:rPr lang="en-US"/>
               <a:t>Third level</a:t>
             </a:r>
           </a:p>
           <a:p>
             <a:pPr lvl="3"/>
             <a:r>
-              <a:rPr lang="en-US" smtClean="0"/>
+              <a:rPr lang="en-US"/>
               <a:t>Fourth level</a:t>
             </a:r>
           </a:p>
           <a:p>
             <a:pPr lvl="4"/>
             <a:r>
-              <a:rPr lang="en-US" smtClean="0"/>
+              <a:rPr lang="en-US"/>
               <a:t>Fifth level</a:t>
             </a:r>
-            <a:endParaRPr lang="en-US"/>
           </a:p>
         </p:txBody>
       </p:sp>
@@ -468,7 +480,7 @@
           <a:p>
             <a:fld id="{5BCAD085-E8A6-8845-BD4E-CB4CCA059FC4}" type="datetimeFigureOut">
               <a:rPr lang="en-US" smtClean="0"/>
-              <a:t>1/27/13</a:t>
+              <a:t>3/18/2026</a:t>
             </a:fld>
             <a:endParaRPr lang="en-US"/>
           </a:p>
@@ -567,10 +579,9 @@
           <a:lstStyle/>
           <a:p>
             <a:r>
-              <a:rPr lang="en-US" smtClean="0"/>
+              <a:rPr lang="en-US"/>
               <a:t>Click to edit Master title style</a:t>
             </a:r>
-            <a:endParaRPr lang="en-US"/>
           </a:p>
         </p:txBody>
       </p:sp>
@@ -596,38 +607,37 @@
           <a:p>
             <a:pPr lvl="0"/>
             <a:r>
-              <a:rPr lang="en-US" smtClean="0"/>
+              <a:rPr lang="en-US"/>
               <a:t>Click to edit Master text styles</a:t>
             </a:r>
           </a:p>
           <a:p>
             <a:pPr lvl="1"/>
             <a:r>
-              <a:rPr lang="en-US" smtClean="0"/>
+              <a:rPr lang="en-US"/>
               <a:t>Second level</a:t>
             </a:r>
           </a:p>
           <a:p>
             <a:pPr lvl="2"/>
             <a:r>
-              <a:rPr lang="en-US" smtClean="0"/>
+              <a:rPr lang="en-US"/>
               <a:t>Third level</a:t>
             </a:r>
           </a:p>
           <a:p>
             <a:pPr lvl="3"/>
             <a:r>
-              <a:rPr lang="en-US" smtClean="0"/>
+              <a:rPr lang="en-US"/>
               <a:t>Fourth level</a:t>
             </a:r>
           </a:p>
           <a:p>
             <a:pPr lvl="4"/>
             <a:r>
-              <a:rPr lang="en-US" smtClean="0"/>
+              <a:rPr lang="en-US"/>
               <a:t>Fifth level</a:t>
             </a:r>
-            <a:endParaRPr lang="en-US"/>
           </a:p>
         </p:txBody>
       </p:sp>
@@ -648,7 +658,7 @@
           <a:p>
             <a:fld id="{5BCAD085-E8A6-8845-BD4E-CB4CCA059FC4}" type="datetimeFigureOut">
               <a:rPr lang="en-US" smtClean="0"/>
-              <a:t>1/27/13</a:t>
+              <a:t>3/18/2026</a:t>
             </a:fld>
             <a:endParaRPr lang="en-US"/>
           </a:p>
@@ -742,10 +752,9 @@
           <a:lstStyle/>
           <a:p>
             <a:r>
-              <a:rPr lang="en-US" smtClean="0"/>
+              <a:rPr lang="en-US"/>
               <a:t>Click to edit Master title style</a:t>
             </a:r>
-            <a:endParaRPr lang="en-US"/>
           </a:p>
         </p:txBody>
       </p:sp>
@@ -766,38 +775,37 @@
           <a:p>
             <a:pPr lvl="0"/>
             <a:r>
-              <a:rPr lang="en-US" smtClean="0"/>
+              <a:rPr lang="en-US"/>
               <a:t>Click to edit Master text styles</a:t>
             </a:r>
           </a:p>
           <a:p>
             <a:pPr lvl="1"/>
             <a:r>
-              <a:rPr lang="en-US" smtClean="0"/>
+              <a:rPr lang="en-US"/>
               <a:t>Second level</a:t>
             </a:r>
           </a:p>
           <a:p>
             <a:pPr lvl="2"/>
             <a:r>
-              <a:rPr lang="en-US" smtClean="0"/>
+              <a:rPr lang="en-US"/>
               <a:t>Third level</a:t>
             </a:r>
           </a:p>
           <a:p>
             <a:pPr lvl="3"/>
             <a:r>
-              <a:rPr lang="en-US" smtClean="0"/>
+              <a:rPr lang="en-US"/>
               <a:t>Fourth level</a:t>
             </a:r>
           </a:p>
           <a:p>
             <a:pPr lvl="4"/>
             <a:r>
-              <a:rPr lang="en-US" smtClean="0"/>
+              <a:rPr lang="en-US"/>
               <a:t>Fifth level</a:t>
             </a:r>
-            <a:endParaRPr lang="en-US"/>
           </a:p>
         </p:txBody>
       </p:sp>
@@ -818,7 +826,7 @@
           <a:p>
             <a:fld id="{5BCAD085-E8A6-8845-BD4E-CB4CCA059FC4}" type="datetimeFigureOut">
               <a:rPr lang="en-US" smtClean="0"/>
-              <a:t>1/27/13</a:t>
+              <a:t>3/18/2026</a:t>
             </a:fld>
             <a:endParaRPr lang="en-US"/>
           </a:p>
@@ -921,10 +929,9 @@
           </a:lstStyle>
           <a:p>
             <a:r>
-              <a:rPr lang="en-US" smtClean="0"/>
+              <a:rPr lang="en-US"/>
               <a:t>Click to edit Master title style</a:t>
             </a:r>
-            <a:endParaRPr lang="en-US"/>
           </a:p>
         </p:txBody>
       </p:sp>
@@ -1041,7 +1048,7 @@
           <a:p>
             <a:pPr lvl="0"/>
             <a:r>
-              <a:rPr lang="en-US" smtClean="0"/>
+              <a:rPr lang="en-US"/>
               <a:t>Click to edit Master text styles</a:t>
             </a:r>
           </a:p>
@@ -1064,7 +1071,7 @@
           <a:p>
             <a:fld id="{5BCAD085-E8A6-8845-BD4E-CB4CCA059FC4}" type="datetimeFigureOut">
               <a:rPr lang="en-US" smtClean="0"/>
-              <a:t>1/27/13</a:t>
+              <a:t>3/18/2026</a:t>
             </a:fld>
             <a:endParaRPr lang="en-US"/>
           </a:p>
@@ -1158,10 +1165,9 @@
           <a:lstStyle/>
           <a:p>
             <a:r>
-              <a:rPr lang="en-US" smtClean="0"/>
+              <a:rPr lang="en-US"/>
               <a:t>Click to edit Master title style</a:t>
             </a:r>
-            <a:endParaRPr lang="en-US"/>
           </a:p>
         </p:txBody>
       </p:sp>
@@ -1215,38 +1221,37 @@
           <a:p>
             <a:pPr lvl="0"/>
             <a:r>
-              <a:rPr lang="en-US" smtClean="0"/>
+              <a:rPr lang="en-US"/>
               <a:t>Click to edit Master text styles</a:t>
             </a:r>
           </a:p>
           <a:p>
             <a:pPr lvl="1"/>
             <a:r>
-              <a:rPr lang="en-US" smtClean="0"/>
+              <a:rPr lang="en-US"/>
               <a:t>Second level</a:t>
             </a:r>
           </a:p>
           <a:p>
             <a:pPr lvl="2"/>
             <a:r>
-              <a:rPr lang="en-US" smtClean="0"/>
+              <a:rPr lang="en-US"/>
               <a:t>Third level</a:t>
             </a:r>
           </a:p>
           <a:p>
             <a:pPr lvl="3"/>
             <a:r>
-              <a:rPr lang="en-US" smtClean="0"/>
+              <a:rPr lang="en-US"/>
               <a:t>Fourth level</a:t>
             </a:r>
           </a:p>
           <a:p>
             <a:pPr lvl="4"/>
             <a:r>
-              <a:rPr lang="en-US" smtClean="0"/>
+              <a:rPr lang="en-US"/>
               <a:t>Fifth level</a:t>
             </a:r>
-            <a:endParaRPr lang="en-US"/>
           </a:p>
         </p:txBody>
       </p:sp>
@@ -1300,38 +1305,37 @@
           <a:p>
             <a:pPr lvl="0"/>
             <a:r>
-              <a:rPr lang="en-US" smtClean="0"/>
+              <a:rPr lang="en-US"/>
               <a:t>Click to edit Master text styles</a:t>
             </a:r>
           </a:p>
           <a:p>
             <a:pPr lvl="1"/>
             <a:r>
-              <a:rPr lang="en-US" smtClean="0"/>
+              <a:rPr lang="en-US"/>
               <a:t>Second level</a:t>
             </a:r>
           </a:p>
           <a:p>
             <a:pPr lvl="2"/>
             <a:r>
-              <a:rPr lang="en-US" smtClean="0"/>
+              <a:rPr lang="en-US"/>
               <a:t>Third level</a:t>
             </a:r>
           </a:p>
           <a:p>
             <a:pPr lvl="3"/>
             <a:r>
-              <a:rPr lang="en-US" smtClean="0"/>
+              <a:rPr lang="en-US"/>
               <a:t>Fourth level</a:t>
             </a:r>
           </a:p>
           <a:p>
             <a:pPr lvl="4"/>
             <a:r>
-              <a:rPr lang="en-US" smtClean="0"/>
+              <a:rPr lang="en-US"/>
               <a:t>Fifth level</a:t>
             </a:r>
-            <a:endParaRPr lang="en-US"/>
           </a:p>
         </p:txBody>
       </p:sp>
@@ -1352,7 +1356,7 @@
           <a:p>
             <a:fld id="{5BCAD085-E8A6-8845-BD4E-CB4CCA059FC4}" type="datetimeFigureOut">
               <a:rPr lang="en-US" smtClean="0"/>
-              <a:t>1/27/13</a:t>
+              <a:t>3/18/2026</a:t>
             </a:fld>
             <a:endParaRPr lang="en-US"/>
           </a:p>
@@ -1450,10 +1454,9 @@
           </a:lstStyle>
           <a:p>
             <a:r>
-              <a:rPr lang="en-US" smtClean="0"/>
+              <a:rPr lang="en-US"/>
               <a:t>Click to edit Master title style</a:t>
             </a:r>
-            <a:endParaRPr lang="en-US"/>
           </a:p>
         </p:txBody>
       </p:sp>
@@ -1516,7 +1519,7 @@
           <a:p>
             <a:pPr lvl="0"/>
             <a:r>
-              <a:rPr lang="en-US" smtClean="0"/>
+              <a:rPr lang="en-US"/>
               <a:t>Click to edit Master text styles</a:t>
             </a:r>
           </a:p>
@@ -1572,38 +1575,37 @@
           <a:p>
             <a:pPr lvl="0"/>
             <a:r>
-              <a:rPr lang="en-US" smtClean="0"/>
+              <a:rPr lang="en-US"/>
               <a:t>Click to edit Master text styles</a:t>
             </a:r>
           </a:p>
           <a:p>
             <a:pPr lvl="1"/>
             <a:r>
-              <a:rPr lang="en-US" smtClean="0"/>
+              <a:rPr lang="en-US"/>
               <a:t>Second level</a:t>
             </a:r>
           </a:p>
           <a:p>
             <a:pPr lvl="2"/>
             <a:r>
-              <a:rPr lang="en-US" smtClean="0"/>
+              <a:rPr lang="en-US"/>
               <a:t>Third level</a:t>
             </a:r>
           </a:p>
           <a:p>
             <a:pPr lvl="3"/>
             <a:r>
-              <a:rPr lang="en-US" smtClean="0"/>
+              <a:rPr lang="en-US"/>
               <a:t>Fourth level</a:t>
             </a:r>
           </a:p>
           <a:p>
             <a:pPr lvl="4"/>
             <a:r>
-              <a:rPr lang="en-US" smtClean="0"/>
+              <a:rPr lang="en-US"/>
               <a:t>Fifth level</a:t>
             </a:r>
-            <a:endParaRPr lang="en-US"/>
           </a:p>
         </p:txBody>
       </p:sp>
@@ -1666,7 +1668,7 @@
           <a:p>
             <a:pPr lvl="0"/>
             <a:r>
-              <a:rPr lang="en-US" smtClean="0"/>
+              <a:rPr lang="en-US"/>
               <a:t>Click to edit Master text styles</a:t>
             </a:r>
           </a:p>
@@ -1722,38 +1724,37 @@
           <a:p>
             <a:pPr lvl="0"/>
             <a:r>
-              <a:rPr lang="en-US" smtClean="0"/>
+              <a:rPr lang="en-US"/>
               <a:t>Click to edit Master text styles</a:t>
             </a:r>
           </a:p>
           <a:p>
             <a:pPr lvl="1"/>
             <a:r>
-              <a:rPr lang="en-US" smtClean="0"/>
+              <a:rPr lang="en-US"/>
               <a:t>Second level</a:t>
             </a:r>
           </a:p>
           <a:p>
             <a:pPr lvl="2"/>
             <a:r>
-              <a:rPr lang="en-US" smtClean="0"/>
+              <a:rPr lang="en-US"/>
               <a:t>Third level</a:t>
             </a:r>
           </a:p>
           <a:p>
             <a:pPr lvl="3"/>
             <a:r>
-              <a:rPr lang="en-US" smtClean="0"/>
+              <a:rPr lang="en-US"/>
               <a:t>Fourth level</a:t>
             </a:r>
           </a:p>
           <a:p>
             <a:pPr lvl="4"/>
             <a:r>
-              <a:rPr lang="en-US" smtClean="0"/>
+              <a:rPr lang="en-US"/>
               <a:t>Fifth level</a:t>
             </a:r>
-            <a:endParaRPr lang="en-US"/>
           </a:p>
         </p:txBody>
       </p:sp>
@@ -1774,7 +1775,7 @@
           <a:p>
             <a:fld id="{5BCAD085-E8A6-8845-BD4E-CB4CCA059FC4}" type="datetimeFigureOut">
               <a:rPr lang="en-US" smtClean="0"/>
-              <a:t>1/27/13</a:t>
+              <a:t>3/18/2026</a:t>
             </a:fld>
             <a:endParaRPr lang="en-US"/>
           </a:p>
@@ -1868,10 +1869,9 @@
           <a:lstStyle/>
           <a:p>
             <a:r>
-              <a:rPr lang="en-US" smtClean="0"/>
+              <a:rPr lang="en-US"/>
               <a:t>Click to edit Master title style</a:t>
             </a:r>
-            <a:endParaRPr lang="en-US"/>
           </a:p>
         </p:txBody>
       </p:sp>
@@ -1892,7 +1892,7 @@
           <a:p>
             <a:fld id="{5BCAD085-E8A6-8845-BD4E-CB4CCA059FC4}" type="datetimeFigureOut">
               <a:rPr lang="en-US" smtClean="0"/>
-              <a:t>1/27/13</a:t>
+              <a:t>3/18/2026</a:t>
             </a:fld>
             <a:endParaRPr lang="en-US"/>
           </a:p>
@@ -1987,7 +1987,7 @@
           <a:p>
             <a:fld id="{5BCAD085-E8A6-8845-BD4E-CB4CCA059FC4}" type="datetimeFigureOut">
               <a:rPr lang="en-US" smtClean="0"/>
-              <a:t>1/27/13</a:t>
+              <a:t>3/18/2026</a:t>
             </a:fld>
             <a:endParaRPr lang="en-US"/>
           </a:p>
@@ -2090,10 +2090,9 @@
           </a:lstStyle>
           <a:p>
             <a:r>
-              <a:rPr lang="en-US" smtClean="0"/>
+              <a:rPr lang="en-US"/>
               <a:t>Click to edit Master title style</a:t>
             </a:r>
-            <a:endParaRPr lang="en-US"/>
           </a:p>
         </p:txBody>
       </p:sp>
@@ -2147,38 +2146,37 @@
           <a:p>
             <a:pPr lvl="0"/>
             <a:r>
-              <a:rPr lang="en-US" smtClean="0"/>
+              <a:rPr lang="en-US"/>
               <a:t>Click to edit Master text styles</a:t>
             </a:r>
           </a:p>
           <a:p>
             <a:pPr lvl="1"/>
             <a:r>
-              <a:rPr lang="en-US" smtClean="0"/>
+              <a:rPr lang="en-US"/>
               <a:t>Second level</a:t>
             </a:r>
           </a:p>
           <a:p>
             <a:pPr lvl="2"/>
             <a:r>
-              <a:rPr lang="en-US" smtClean="0"/>
+              <a:rPr lang="en-US"/>
               <a:t>Third level</a:t>
             </a:r>
           </a:p>
           <a:p>
             <a:pPr lvl="3"/>
             <a:r>
-              <a:rPr lang="en-US" smtClean="0"/>
+              <a:rPr lang="en-US"/>
               <a:t>Fourth level</a:t>
             </a:r>
           </a:p>
           <a:p>
             <a:pPr lvl="4"/>
             <a:r>
-              <a:rPr lang="en-US" smtClean="0"/>
+              <a:rPr lang="en-US"/>
               <a:t>Fifth level</a:t>
             </a:r>
-            <a:endParaRPr lang="en-US"/>
           </a:p>
         </p:txBody>
       </p:sp>
@@ -2241,7 +2239,7 @@
           <a:p>
             <a:pPr lvl="0"/>
             <a:r>
-              <a:rPr lang="en-US" smtClean="0"/>
+              <a:rPr lang="en-US"/>
               <a:t>Click to edit Master text styles</a:t>
             </a:r>
           </a:p>
@@ -2264,7 +2262,7 @@
           <a:p>
             <a:fld id="{5BCAD085-E8A6-8845-BD4E-CB4CCA059FC4}" type="datetimeFigureOut">
               <a:rPr lang="en-US" smtClean="0"/>
-              <a:t>1/27/13</a:t>
+              <a:t>3/18/2026</a:t>
             </a:fld>
             <a:endParaRPr lang="en-US"/>
           </a:p>
@@ -2367,10 +2365,9 @@
           </a:lstStyle>
           <a:p>
             <a:r>
-              <a:rPr lang="en-US" smtClean="0"/>
+              <a:rPr lang="en-US"/>
               <a:t>Click to edit Master title style</a:t>
             </a:r>
-            <a:endParaRPr lang="en-US"/>
           </a:p>
         </p:txBody>
       </p:sp>
@@ -2494,7 +2491,7 @@
           <a:p>
             <a:pPr lvl="0"/>
             <a:r>
-              <a:rPr lang="en-US" smtClean="0"/>
+              <a:rPr lang="en-US"/>
               <a:t>Click to edit Master text styles</a:t>
             </a:r>
           </a:p>
@@ -2517,7 +2514,7 @@
           <a:p>
             <a:fld id="{5BCAD085-E8A6-8845-BD4E-CB4CCA059FC4}" type="datetimeFigureOut">
               <a:rPr lang="en-US" smtClean="0"/>
-              <a:t>1/27/13</a:t>
+              <a:t>3/18/2026</a:t>
             </a:fld>
             <a:endParaRPr lang="en-US"/>
           </a:p>
@@ -2626,10 +2623,9 @@
           <a:lstStyle/>
           <a:p>
             <a:r>
-              <a:rPr lang="en-US" smtClean="0"/>
+              <a:rPr lang="en-US"/>
               <a:t>Click to edit Master title style</a:t>
             </a:r>
-            <a:endParaRPr lang="en-US"/>
           </a:p>
         </p:txBody>
       </p:sp>
@@ -2660,38 +2656,37 @@
           <a:p>
             <a:pPr lvl="0"/>
             <a:r>
-              <a:rPr lang="en-US" smtClean="0"/>
+              <a:rPr lang="en-US"/>
               <a:t>Click to edit Master text styles</a:t>
             </a:r>
           </a:p>
           <a:p>
             <a:pPr lvl="1"/>
             <a:r>
-              <a:rPr lang="en-US" smtClean="0"/>
+              <a:rPr lang="en-US"/>
               <a:t>Second level</a:t>
             </a:r>
           </a:p>
           <a:p>
             <a:pPr lvl="2"/>
             <a:r>
-              <a:rPr lang="en-US" smtClean="0"/>
+              <a:rPr lang="en-US"/>
               <a:t>Third level</a:t>
             </a:r>
           </a:p>
           <a:p>
             <a:pPr lvl="3"/>
             <a:r>
-              <a:rPr lang="en-US" smtClean="0"/>
+              <a:rPr lang="en-US"/>
               <a:t>Fourth level</a:t>
             </a:r>
           </a:p>
           <a:p>
             <a:pPr lvl="4"/>
             <a:r>
-              <a:rPr lang="en-US" smtClean="0"/>
+              <a:rPr lang="en-US"/>
               <a:t>Fifth level</a:t>
             </a:r>
-            <a:endParaRPr lang="en-US"/>
           </a:p>
         </p:txBody>
       </p:sp>
@@ -2730,7 +2725,7 @@
           <a:p>
             <a:fld id="{5BCAD085-E8A6-8845-BD4E-CB4CCA059FC4}" type="datetimeFigureOut">
               <a:rPr lang="en-US" smtClean="0"/>
-              <a:t>1/27/13</a:t>
+              <a:t>3/18/2026</a:t>
             </a:fld>
             <a:endParaRPr lang="en-US"/>
           </a:p>
@@ -3089,7 +3084,7 @@
 </file>
 
 <file path=ppt/slides/slide1.xml><?xml version="1.0" encoding="utf-8"?>
-<p:sld xmlns:a="http://schemas.openxmlformats.org/drawingml/2006/main" xmlns:p="http://schemas.openxmlformats.org/presentationml/2006/main" xmlns:r="http://schemas.openxmlformats.org/officeDocument/2006/relationships">
+<p:sld xmlns:a="http://schemas.openxmlformats.org/drawingml/2006/main" xmlns:r="http://schemas.openxmlformats.org/officeDocument/2006/relationships" xmlns:p="http://schemas.openxmlformats.org/presentationml/2006/main">
   <p:cSld>
     <p:bg>
       <p:bgPr>
@@ -3105,7 +3100,14 @@
         <p:cNvGrpSpPr/>
         <p:nvPr/>
       </p:nvGrpSpPr>
-      <p:grpSpPr/>
+      <p:grpSpPr>
+        <a:xfrm>
+          <a:off x="0" y="0"/>
+          <a:ext cx="0" cy="0"/>
+          <a:chOff x="0" y="0"/>
+          <a:chExt cx="0" cy="0"/>
+        </a:xfrm>
+      </p:grpSpPr>
       <p:sp>
         <p:nvSpPr>
           <p:cNvPr id="2" name="TextBox 1"/>
@@ -3259,7 +3261,7 @@
 </file>
 
 <file path=ppt/slides/slide10.xml><?xml version="1.0" encoding="utf-8"?>
-<p:sld xmlns:a="http://schemas.openxmlformats.org/drawingml/2006/main" xmlns:p="http://schemas.openxmlformats.org/presentationml/2006/main" xmlns:r="http://schemas.openxmlformats.org/officeDocument/2006/relationships">
+<p:sld xmlns:a="http://schemas.openxmlformats.org/drawingml/2006/main" xmlns:r="http://schemas.openxmlformats.org/officeDocument/2006/relationships" xmlns:p="http://schemas.openxmlformats.org/presentationml/2006/main">
   <p:cSld>
     <p:bg>
       <p:bgPr>
@@ -3275,7 +3277,14 @@
         <p:cNvGrpSpPr/>
         <p:nvPr/>
       </p:nvGrpSpPr>
-      <p:grpSpPr/>
+      <p:grpSpPr>
+        <a:xfrm>
+          <a:off x="0" y="0"/>
+          <a:ext cx="0" cy="0"/>
+          <a:chOff x="0" y="0"/>
+          <a:chExt cx="0" cy="0"/>
+        </a:xfrm>
+      </p:grpSpPr>
       <p:sp>
         <p:nvSpPr>
           <p:cNvPr id="2" name="TextBox 1"/>
@@ -3354,6 +3363,7 @@
           <a:lstStyle/>
           <a:p>
             <a:pPr algn="ctr"/>
+            <a:endParaRPr/>
           </a:p>
         </p:txBody>
       </p:sp>
@@ -3490,6 +3500,7 @@
                 <a:latin typeface="맑은 고딕"/>
               </a:defRPr>
             </a:pPr>
+            <a:endParaRPr/>
           </a:p>
           <a:p>
             <a:pPr>
@@ -3551,6 +3562,7 @@
           <a:lstStyle/>
           <a:p>
             <a:pPr algn="ctr"/>
+            <a:endParaRPr/>
           </a:p>
         </p:txBody>
       </p:sp>
@@ -3719,6 +3731,7 @@
           <a:lstStyle/>
           <a:p>
             <a:pPr algn="ctr"/>
+            <a:endParaRPr/>
           </a:p>
         </p:txBody>
       </p:sp>
@@ -4055,7 +4068,7 @@
 </file>
 
 <file path=ppt/slides/slide11.xml><?xml version="1.0" encoding="utf-8"?>
-<p:sld xmlns:a="http://schemas.openxmlformats.org/drawingml/2006/main" xmlns:p="http://schemas.openxmlformats.org/presentationml/2006/main" xmlns:r="http://schemas.openxmlformats.org/officeDocument/2006/relationships">
+<p:sld xmlns:a="http://schemas.openxmlformats.org/drawingml/2006/main" xmlns:r="http://schemas.openxmlformats.org/officeDocument/2006/relationships" xmlns:p="http://schemas.openxmlformats.org/presentationml/2006/main">
   <p:cSld>
     <p:bg>
       <p:bgPr>
@@ -4071,7 +4084,14 @@
         <p:cNvGrpSpPr/>
         <p:nvPr/>
       </p:nvGrpSpPr>
-      <p:grpSpPr/>
+      <p:grpSpPr>
+        <a:xfrm>
+          <a:off x="0" y="0"/>
+          <a:ext cx="0" cy="0"/>
+          <a:chOff x="0" y="0"/>
+          <a:chExt cx="0" cy="0"/>
+        </a:xfrm>
+      </p:grpSpPr>
       <p:sp>
         <p:nvSpPr>
           <p:cNvPr id="2" name="TextBox 1"/>
@@ -4150,6 +4170,7 @@
           <a:lstStyle/>
           <a:p>
             <a:pPr algn="ctr"/>
+            <a:endParaRPr/>
           </a:p>
         </p:txBody>
       </p:sp>
@@ -4306,7 +4327,7 @@
 </file>
 
 <file path=ppt/slides/slide2.xml><?xml version="1.0" encoding="utf-8"?>
-<p:sld xmlns:a="http://schemas.openxmlformats.org/drawingml/2006/main" xmlns:p="http://schemas.openxmlformats.org/presentationml/2006/main" xmlns:r="http://schemas.openxmlformats.org/officeDocument/2006/relationships">
+<p:sld xmlns:a="http://schemas.openxmlformats.org/drawingml/2006/main" xmlns:r="http://schemas.openxmlformats.org/officeDocument/2006/relationships" xmlns:p="http://schemas.openxmlformats.org/presentationml/2006/main">
   <p:cSld>
     <p:bg>
       <p:bgPr>
@@ -4322,7 +4343,14 @@
         <p:cNvGrpSpPr/>
         <p:nvPr/>
       </p:nvGrpSpPr>
-      <p:grpSpPr/>
+      <p:grpSpPr>
+        <a:xfrm>
+          <a:off x="0" y="0"/>
+          <a:ext cx="0" cy="0"/>
+          <a:chOff x="0" y="0"/>
+          <a:chExt cx="0" cy="0"/>
+        </a:xfrm>
+      </p:grpSpPr>
       <p:sp>
         <p:nvSpPr>
           <p:cNvPr id="2" name="TextBox 1"/>
@@ -4401,6 +4429,7 @@
           <a:lstStyle/>
           <a:p>
             <a:pPr algn="ctr"/>
+            <a:endParaRPr/>
           </a:p>
         </p:txBody>
       </p:sp>
@@ -4412,8 +4441,8 @@
         </p:nvSpPr>
         <p:spPr>
           <a:xfrm>
-            <a:off x="1097280" y="1554480"/>
-            <a:ext cx="10058400" cy="822960"/>
+            <a:off x="507626" y="1745428"/>
+            <a:ext cx="11374867" cy="461665"/>
           </a:xfrm>
           <a:prstGeom prst="rect">
             <a:avLst/>
@@ -4435,6 +4464,7 @@
               </a:defRPr>
             </a:pPr>
             <a:r>
+              <a:rPr sz="2400"/>
               <a:t>Prediction(예측)과 Ground Truth(실제값)의 오차를 줄여나가는 과정</a:t>
             </a:r>
           </a:p>
@@ -4518,6 +4548,7 @@
           <a:lstStyle/>
           <a:p>
             <a:pPr algn="ctr"/>
+            <a:endParaRPr/>
           </a:p>
         </p:txBody>
       </p:sp>
@@ -4635,6 +4666,7 @@
           <a:lstStyle/>
           <a:p>
             <a:pPr algn="ctr"/>
+            <a:endParaRPr/>
           </a:p>
         </p:txBody>
       </p:sp>
@@ -4752,6 +4784,7 @@
           <a:lstStyle/>
           <a:p>
             <a:pPr algn="ctr"/>
+            <a:endParaRPr/>
           </a:p>
         </p:txBody>
       </p:sp>
@@ -4869,6 +4902,7 @@
           <a:lstStyle/>
           <a:p>
             <a:pPr algn="ctr"/>
+            <a:endParaRPr/>
           </a:p>
         </p:txBody>
       </p:sp>
@@ -4986,6 +5020,7 @@
           <a:lstStyle/>
           <a:p>
             <a:pPr algn="ctr"/>
+            <a:endParaRPr/>
           </a:p>
         </p:txBody>
       </p:sp>
@@ -5103,6 +5138,7 @@
           <a:lstStyle/>
           <a:p>
             <a:pPr algn="ctr"/>
+            <a:endParaRPr/>
           </a:p>
         </p:txBody>
       </p:sp>
@@ -5223,7 +5259,7 @@
 </file>
 
 <file path=ppt/slides/slide3.xml><?xml version="1.0" encoding="utf-8"?>
-<p:sld xmlns:a="http://schemas.openxmlformats.org/drawingml/2006/main" xmlns:p="http://schemas.openxmlformats.org/presentationml/2006/main" xmlns:r="http://schemas.openxmlformats.org/officeDocument/2006/relationships">
+<p:sld xmlns:a="http://schemas.openxmlformats.org/drawingml/2006/main" xmlns:r="http://schemas.openxmlformats.org/officeDocument/2006/relationships" xmlns:p="http://schemas.openxmlformats.org/presentationml/2006/main">
   <p:cSld>
     <p:bg>
       <p:bgPr>
@@ -5239,7 +5275,14 @@
         <p:cNvGrpSpPr/>
         <p:nvPr/>
       </p:nvGrpSpPr>
-      <p:grpSpPr/>
+      <p:grpSpPr>
+        <a:xfrm>
+          <a:off x="0" y="0"/>
+          <a:ext cx="0" cy="0"/>
+          <a:chOff x="0" y="0"/>
+          <a:chExt cx="0" cy="0"/>
+        </a:xfrm>
+      </p:grpSpPr>
       <p:sp>
         <p:nvSpPr>
           <p:cNvPr id="2" name="TextBox 1"/>
@@ -5354,6 +5397,7 @@
           <a:lstStyle/>
           <a:p>
             <a:pPr algn="ctr"/>
+            <a:endParaRPr/>
           </a:p>
         </p:txBody>
       </p:sp>
@@ -5435,6 +5479,7 @@
           <a:lstStyle/>
           <a:p>
             <a:pPr algn="ctr"/>
+            <a:endParaRPr/>
           </a:p>
         </p:txBody>
       </p:sp>
@@ -5446,8 +5491,8 @@
         </p:nvSpPr>
         <p:spPr>
           <a:xfrm>
-            <a:off x="822960" y="3383280"/>
-            <a:ext cx="1737360" cy="548640"/>
+            <a:off x="782617" y="3336215"/>
+            <a:ext cx="1828800" cy="369332"/>
           </a:xfrm>
           <a:prstGeom prst="rect">
             <a:avLst/>
@@ -5588,6 +5633,7 @@
           <a:lstStyle/>
           <a:p>
             <a:pPr algn="ctr"/>
+            <a:endParaRPr/>
           </a:p>
         </p:txBody>
       </p:sp>
@@ -5599,8 +5645,8 @@
         </p:nvSpPr>
         <p:spPr>
           <a:xfrm>
-            <a:off x="3063240" y="3383280"/>
-            <a:ext cx="1737360" cy="548640"/>
+            <a:off x="2926080" y="3347435"/>
+            <a:ext cx="2057400" cy="369332"/>
           </a:xfrm>
           <a:prstGeom prst="rect">
             <a:avLst/>
@@ -5741,6 +5787,7 @@
           <a:lstStyle/>
           <a:p>
             <a:pPr algn="ctr"/>
+            <a:endParaRPr/>
           </a:p>
         </p:txBody>
       </p:sp>
@@ -5894,6 +5941,7 @@
           <a:lstStyle/>
           <a:p>
             <a:pPr algn="ctr"/>
+            <a:endParaRPr/>
           </a:p>
         </p:txBody>
       </p:sp>
@@ -6047,6 +6095,7 @@
           <a:lstStyle/>
           <a:p>
             <a:pPr algn="ctr"/>
+            <a:endParaRPr/>
           </a:p>
         </p:txBody>
       </p:sp>
@@ -6167,7 +6216,7 @@
 </file>
 
 <file path=ppt/slides/slide4.xml><?xml version="1.0" encoding="utf-8"?>
-<p:sld xmlns:a="http://schemas.openxmlformats.org/drawingml/2006/main" xmlns:p="http://schemas.openxmlformats.org/presentationml/2006/main" xmlns:r="http://schemas.openxmlformats.org/officeDocument/2006/relationships">
+<p:sld xmlns:a="http://schemas.openxmlformats.org/drawingml/2006/main" xmlns:r="http://schemas.openxmlformats.org/officeDocument/2006/relationships" xmlns:p="http://schemas.openxmlformats.org/presentationml/2006/main">
   <p:cSld>
     <p:bg>
       <p:bgPr>
@@ -6183,7 +6232,14 @@
         <p:cNvGrpSpPr/>
         <p:nvPr/>
       </p:nvGrpSpPr>
-      <p:grpSpPr/>
+      <p:grpSpPr>
+        <a:xfrm>
+          <a:off x="0" y="0"/>
+          <a:ext cx="0" cy="0"/>
+          <a:chOff x="0" y="0"/>
+          <a:chExt cx="0" cy="0"/>
+        </a:xfrm>
+      </p:grpSpPr>
       <p:sp>
         <p:nvSpPr>
           <p:cNvPr id="2" name="TextBox 1"/>
@@ -6262,6 +6318,7 @@
           <a:lstStyle/>
           <a:p>
             <a:pPr algn="ctr"/>
+            <a:endParaRPr/>
           </a:p>
         </p:txBody>
       </p:sp>
@@ -6526,6 +6583,7 @@
           <a:lstStyle/>
           <a:p>
             <a:pPr algn="ctr"/>
+            <a:endParaRPr/>
           </a:p>
         </p:txBody>
       </p:sp>
@@ -6662,6 +6720,7 @@
                 <a:latin typeface="맑은 고딕"/>
               </a:defRPr>
             </a:pPr>
+            <a:endParaRPr/>
           </a:p>
           <a:p>
             <a:pPr>
@@ -6739,6 +6798,7 @@
                 <a:latin typeface="맑은 고딕"/>
               </a:defRPr>
             </a:pPr>
+            <a:endParaRPr/>
           </a:p>
           <a:p>
             <a:pPr>
@@ -6835,7 +6895,7 @@
 </file>
 
 <file path=ppt/slides/slide5.xml><?xml version="1.0" encoding="utf-8"?>
-<p:sld xmlns:a="http://schemas.openxmlformats.org/drawingml/2006/main" xmlns:p="http://schemas.openxmlformats.org/presentationml/2006/main" xmlns:r="http://schemas.openxmlformats.org/officeDocument/2006/relationships">
+<p:sld xmlns:a="http://schemas.openxmlformats.org/drawingml/2006/main" xmlns:r="http://schemas.openxmlformats.org/officeDocument/2006/relationships" xmlns:p="http://schemas.openxmlformats.org/presentationml/2006/main">
   <p:cSld>
     <p:bg>
       <p:bgPr>
@@ -6851,7 +6911,14 @@
         <p:cNvGrpSpPr/>
         <p:nvPr/>
       </p:nvGrpSpPr>
-      <p:grpSpPr/>
+      <p:grpSpPr>
+        <a:xfrm>
+          <a:off x="0" y="0"/>
+          <a:ext cx="0" cy="0"/>
+          <a:chOff x="0" y="0"/>
+          <a:chExt cx="0" cy="0"/>
+        </a:xfrm>
+      </p:grpSpPr>
       <p:sp>
         <p:nvSpPr>
           <p:cNvPr id="2" name="TextBox 1"/>
@@ -6966,6 +7033,7 @@
           <a:lstStyle/>
           <a:p>
             <a:pPr algn="ctr"/>
+            <a:endParaRPr/>
           </a:p>
         </p:txBody>
       </p:sp>
@@ -7049,8 +7117,8 @@
         </p:nvSpPr>
         <p:spPr>
           <a:xfrm>
-            <a:off x="320040" y="2834640"/>
-            <a:ext cx="1188720" cy="1828800"/>
+            <a:off x="173736" y="2886715"/>
+            <a:ext cx="1508760" cy="261610"/>
           </a:xfrm>
           <a:prstGeom prst="rect">
             <a:avLst/>
@@ -7155,6 +7223,7 @@
           <a:lstStyle/>
           <a:p>
             <a:pPr algn="ctr"/>
+            <a:endParaRPr/>
           </a:p>
         </p:txBody>
       </p:sp>
@@ -7238,8 +7307,8 @@
         </p:nvSpPr>
         <p:spPr>
           <a:xfrm>
-            <a:off x="1764792" y="2834640"/>
-            <a:ext cx="1188720" cy="1828800"/>
+            <a:off x="1719072" y="2860953"/>
+            <a:ext cx="1280160" cy="430887"/>
           </a:xfrm>
           <a:prstGeom prst="rect">
             <a:avLst/>
@@ -7348,6 +7417,7 @@
           <a:lstStyle/>
           <a:p>
             <a:pPr algn="ctr"/>
+            <a:endParaRPr/>
           </a:p>
         </p:txBody>
       </p:sp>
@@ -7431,8 +7501,8 @@
         </p:nvSpPr>
         <p:spPr>
           <a:xfrm>
-            <a:off x="3209544" y="2834640"/>
-            <a:ext cx="1188720" cy="1828800"/>
+            <a:off x="3172968" y="2904565"/>
+            <a:ext cx="1280160" cy="430887"/>
           </a:xfrm>
           <a:prstGeom prst="rect">
             <a:avLst/>
@@ -7541,6 +7611,7 @@
           <a:lstStyle/>
           <a:p>
             <a:pPr algn="ctr"/>
+            <a:endParaRPr/>
           </a:p>
         </p:txBody>
       </p:sp>
@@ -7624,8 +7695,8 @@
         </p:nvSpPr>
         <p:spPr>
           <a:xfrm>
-            <a:off x="4654296" y="2834640"/>
-            <a:ext cx="1188720" cy="1828800"/>
+            <a:off x="4581144" y="2904564"/>
+            <a:ext cx="1353312" cy="430887"/>
           </a:xfrm>
           <a:prstGeom prst="rect">
             <a:avLst/>
@@ -7734,6 +7805,7 @@
           <a:lstStyle/>
           <a:p>
             <a:pPr algn="ctr"/>
+            <a:endParaRPr/>
           </a:p>
         </p:txBody>
       </p:sp>
@@ -7927,6 +7999,7 @@
           <a:lstStyle/>
           <a:p>
             <a:pPr algn="ctr"/>
+            <a:endParaRPr/>
           </a:p>
         </p:txBody>
       </p:sp>
@@ -8010,8 +8083,8 @@
         </p:nvSpPr>
         <p:spPr>
           <a:xfrm>
-            <a:off x="7543800" y="2834640"/>
-            <a:ext cx="1188720" cy="1828800"/>
+            <a:off x="7472262" y="2875771"/>
+            <a:ext cx="1350085" cy="430887"/>
           </a:xfrm>
           <a:prstGeom prst="rect">
             <a:avLst/>
@@ -8120,6 +8193,7 @@
           <a:lstStyle/>
           <a:p>
             <a:pPr algn="ctr"/>
+            <a:endParaRPr/>
           </a:p>
         </p:txBody>
       </p:sp>
@@ -8313,6 +8387,7 @@
           <a:lstStyle/>
           <a:p>
             <a:pPr algn="ctr"/>
+            <a:endParaRPr/>
           </a:p>
         </p:txBody>
       </p:sp>
@@ -8396,8 +8471,8 @@
         </p:nvSpPr>
         <p:spPr>
           <a:xfrm>
-            <a:off x="10433304" y="2834640"/>
-            <a:ext cx="1188720" cy="1828800"/>
+            <a:off x="10360152" y="2886715"/>
+            <a:ext cx="1399032" cy="430887"/>
           </a:xfrm>
           <a:prstGeom prst="rect">
             <a:avLst/>
@@ -8617,7 +8692,7 @@
 </file>
 
 <file path=ppt/slides/slide6.xml><?xml version="1.0" encoding="utf-8"?>
-<p:sld xmlns:a="http://schemas.openxmlformats.org/drawingml/2006/main" xmlns:p="http://schemas.openxmlformats.org/presentationml/2006/main" xmlns:r="http://schemas.openxmlformats.org/officeDocument/2006/relationships">
+<p:sld xmlns:a="http://schemas.openxmlformats.org/drawingml/2006/main" xmlns:r="http://schemas.openxmlformats.org/officeDocument/2006/relationships" xmlns:p="http://schemas.openxmlformats.org/presentationml/2006/main">
   <p:cSld>
     <p:bg>
       <p:bgPr>
@@ -8633,7 +8708,14 @@
         <p:cNvGrpSpPr/>
         <p:nvPr/>
       </p:nvGrpSpPr>
-      <p:grpSpPr/>
+      <p:grpSpPr>
+        <a:xfrm>
+          <a:off x="0" y="0"/>
+          <a:ext cx="0" cy="0"/>
+          <a:chOff x="0" y="0"/>
+          <a:chExt cx="0" cy="0"/>
+        </a:xfrm>
+      </p:grpSpPr>
       <p:sp>
         <p:nvSpPr>
           <p:cNvPr id="2" name="TextBox 1"/>
@@ -8712,6 +8794,7 @@
           <a:lstStyle/>
           <a:p>
             <a:pPr algn="ctr"/>
+            <a:endParaRPr/>
           </a:p>
         </p:txBody>
       </p:sp>
@@ -8829,6 +8912,7 @@
           <a:lstStyle/>
           <a:p>
             <a:pPr algn="ctr"/>
+            <a:endParaRPr/>
           </a:p>
         </p:txBody>
       </p:sp>
@@ -8946,6 +9030,7 @@
           <a:lstStyle/>
           <a:p>
             <a:pPr algn="ctr"/>
+            <a:endParaRPr/>
           </a:p>
         </p:txBody>
       </p:sp>
@@ -9063,6 +9148,7 @@
           <a:lstStyle/>
           <a:p>
             <a:pPr algn="ctr"/>
+            <a:endParaRPr/>
           </a:p>
         </p:txBody>
       </p:sp>
@@ -9180,6 +9266,7 @@
           <a:lstStyle/>
           <a:p>
             <a:pPr algn="ctr"/>
+            <a:endParaRPr/>
           </a:p>
         </p:txBody>
       </p:sp>
@@ -9297,6 +9384,7 @@
           <a:lstStyle/>
           <a:p>
             <a:pPr algn="ctr"/>
+            <a:endParaRPr/>
           </a:p>
         </p:txBody>
       </p:sp>
@@ -9414,6 +9502,7 @@
           <a:lstStyle/>
           <a:p>
             <a:pPr algn="ctr"/>
+            <a:endParaRPr/>
           </a:p>
         </p:txBody>
       </p:sp>
@@ -9531,6 +9620,7 @@
           <a:lstStyle/>
           <a:p>
             <a:pPr algn="ctr"/>
+            <a:endParaRPr/>
           </a:p>
         </p:txBody>
       </p:sp>
@@ -9648,6 +9738,7 @@
           <a:lstStyle/>
           <a:p>
             <a:pPr algn="ctr"/>
+            <a:endParaRPr/>
           </a:p>
         </p:txBody>
       </p:sp>
@@ -9729,6 +9820,7 @@
           <a:lstStyle/>
           <a:p>
             <a:pPr algn="ctr"/>
+            <a:endParaRPr/>
           </a:p>
         </p:txBody>
       </p:sp>
@@ -9833,6 +9925,7 @@
                 <a:latin typeface="맑은 고딕"/>
               </a:defRPr>
             </a:pPr>
+            <a:endParaRPr/>
           </a:p>
           <a:p>
             <a:pPr>
@@ -9862,6 +9955,7 @@
                 <a:latin typeface="맑은 고딕"/>
               </a:defRPr>
             </a:pPr>
+            <a:endParaRPr/>
           </a:p>
           <a:p>
             <a:pPr>
@@ -9907,6 +10001,7 @@
                 <a:latin typeface="맑은 고딕"/>
               </a:defRPr>
             </a:pPr>
+            <a:endParaRPr/>
           </a:p>
           <a:p>
             <a:pPr>
@@ -9936,6 +10031,7 @@
                 <a:latin typeface="맑은 고딕"/>
               </a:defRPr>
             </a:pPr>
+            <a:endParaRPr/>
           </a:p>
           <a:p>
             <a:pPr>
@@ -9964,7 +10060,7 @@
 </file>
 
 <file path=ppt/slides/slide7.xml><?xml version="1.0" encoding="utf-8"?>
-<p:sld xmlns:a="http://schemas.openxmlformats.org/drawingml/2006/main" xmlns:p="http://schemas.openxmlformats.org/presentationml/2006/main" xmlns:r="http://schemas.openxmlformats.org/officeDocument/2006/relationships">
+<p:sld xmlns:a="http://schemas.openxmlformats.org/drawingml/2006/main" xmlns:r="http://schemas.openxmlformats.org/officeDocument/2006/relationships" xmlns:p="http://schemas.openxmlformats.org/presentationml/2006/main">
   <p:cSld>
     <p:bg>
       <p:bgPr>
@@ -9980,7 +10076,14 @@
         <p:cNvGrpSpPr/>
         <p:nvPr/>
       </p:nvGrpSpPr>
-      <p:grpSpPr/>
+      <p:grpSpPr>
+        <a:xfrm>
+          <a:off x="0" y="0"/>
+          <a:ext cx="0" cy="0"/>
+          <a:chOff x="0" y="0"/>
+          <a:chExt cx="0" cy="0"/>
+        </a:xfrm>
+      </p:grpSpPr>
       <p:sp>
         <p:nvSpPr>
           <p:cNvPr id="2" name="TextBox 1"/>
@@ -10059,6 +10162,7 @@
           <a:lstStyle/>
           <a:p>
             <a:pPr algn="ctr"/>
+            <a:endParaRPr/>
           </a:p>
         </p:txBody>
       </p:sp>
@@ -10163,6 +10267,7 @@
                 <a:latin typeface="맑은 고딕"/>
               </a:defRPr>
             </a:pPr>
+            <a:endParaRPr/>
           </a:p>
           <a:p>
             <a:pPr>
@@ -10224,6 +10329,7 @@
                 <a:latin typeface="맑은 고딕"/>
               </a:defRPr>
             </a:pPr>
+            <a:endParaRPr/>
           </a:p>
           <a:p>
             <a:pPr>
@@ -10269,6 +10375,7 @@
                 <a:latin typeface="맑은 고딕"/>
               </a:defRPr>
             </a:pPr>
+            <a:endParaRPr/>
           </a:p>
           <a:p>
             <a:pPr>
@@ -10378,6 +10485,7 @@
           <a:lstStyle/>
           <a:p>
             <a:pPr algn="ctr"/>
+            <a:endParaRPr/>
           </a:p>
         </p:txBody>
       </p:sp>
@@ -10466,6 +10574,7 @@
                 <a:latin typeface="맑은 고딕"/>
               </a:defRPr>
             </a:pPr>
+            <a:endParaRPr/>
           </a:p>
           <a:p>
             <a:pPr>
@@ -10527,6 +10636,7 @@
                 <a:latin typeface="맑은 고딕"/>
               </a:defRPr>
             </a:pPr>
+            <a:endParaRPr/>
           </a:p>
           <a:p>
             <a:pPr>
@@ -10588,6 +10698,7 @@
                 <a:latin typeface="맑은 고딕"/>
               </a:defRPr>
             </a:pPr>
+            <a:endParaRPr/>
           </a:p>
           <a:p>
             <a:pPr>
@@ -10696,7 +10807,7 @@
 </file>
 
 <file path=ppt/slides/slide8.xml><?xml version="1.0" encoding="utf-8"?>
-<p:sld xmlns:a="http://schemas.openxmlformats.org/drawingml/2006/main" xmlns:p="http://schemas.openxmlformats.org/presentationml/2006/main" xmlns:r="http://schemas.openxmlformats.org/officeDocument/2006/relationships">
+<p:sld xmlns:a="http://schemas.openxmlformats.org/drawingml/2006/main" xmlns:r="http://schemas.openxmlformats.org/officeDocument/2006/relationships" xmlns:p="http://schemas.openxmlformats.org/presentationml/2006/main">
   <p:cSld>
     <p:bg>
       <p:bgPr>
@@ -10712,7 +10823,14 @@
         <p:cNvGrpSpPr/>
         <p:nvPr/>
       </p:nvGrpSpPr>
-      <p:grpSpPr/>
+      <p:grpSpPr>
+        <a:xfrm>
+          <a:off x="0" y="0"/>
+          <a:ext cx="0" cy="0"/>
+          <a:chOff x="0" y="0"/>
+          <a:chExt cx="0" cy="0"/>
+        </a:xfrm>
+      </p:grpSpPr>
       <p:sp>
         <p:nvSpPr>
           <p:cNvPr id="2" name="TextBox 1"/>
@@ -10791,6 +10909,7 @@
           <a:lstStyle/>
           <a:p>
             <a:pPr algn="ctr"/>
+            <a:endParaRPr/>
           </a:p>
         </p:txBody>
       </p:sp>
@@ -10908,6 +11027,7 @@
           <a:lstStyle/>
           <a:p>
             <a:pPr algn="ctr"/>
+            <a:endParaRPr/>
           </a:p>
         </p:txBody>
       </p:sp>
@@ -11025,6 +11145,7 @@
           <a:lstStyle/>
           <a:p>
             <a:pPr algn="ctr"/>
+            <a:endParaRPr/>
           </a:p>
         </p:txBody>
       </p:sp>
@@ -11142,6 +11263,7 @@
           <a:lstStyle/>
           <a:p>
             <a:pPr algn="ctr"/>
+            <a:endParaRPr/>
           </a:p>
         </p:txBody>
       </p:sp>
@@ -11259,6 +11381,7 @@
           <a:lstStyle/>
           <a:p>
             <a:pPr algn="ctr"/>
+            <a:endParaRPr/>
           </a:p>
         </p:txBody>
       </p:sp>
@@ -11376,6 +11499,7 @@
           <a:lstStyle/>
           <a:p>
             <a:pPr algn="ctr"/>
+            <a:endParaRPr/>
           </a:p>
         </p:txBody>
       </p:sp>
@@ -11493,6 +11617,7 @@
           <a:lstStyle/>
           <a:p>
             <a:pPr algn="ctr"/>
+            <a:endParaRPr/>
           </a:p>
         </p:txBody>
       </p:sp>
@@ -11610,6 +11735,7 @@
           <a:lstStyle/>
           <a:p>
             <a:pPr algn="ctr"/>
+            <a:endParaRPr/>
           </a:p>
         </p:txBody>
       </p:sp>
@@ -11727,6 +11853,7 @@
           <a:lstStyle/>
           <a:p>
             <a:pPr algn="ctr"/>
+            <a:endParaRPr/>
           </a:p>
         </p:txBody>
       </p:sp>
@@ -11844,6 +11971,7 @@
           <a:lstStyle/>
           <a:p>
             <a:pPr algn="ctr"/>
+            <a:endParaRPr/>
           </a:p>
         </p:txBody>
       </p:sp>
@@ -11961,6 +12089,7 @@
           <a:lstStyle/>
           <a:p>
             <a:pPr algn="ctr"/>
+            <a:endParaRPr/>
           </a:p>
         </p:txBody>
       </p:sp>
@@ -12045,7 +12174,7 @@
 </file>
 
 <file path=ppt/slides/slide9.xml><?xml version="1.0" encoding="utf-8"?>
-<p:sld xmlns:a="http://schemas.openxmlformats.org/drawingml/2006/main" xmlns:p="http://schemas.openxmlformats.org/presentationml/2006/main" xmlns:r="http://schemas.openxmlformats.org/officeDocument/2006/relationships">
+<p:sld xmlns:a="http://schemas.openxmlformats.org/drawingml/2006/main" xmlns:r="http://schemas.openxmlformats.org/officeDocument/2006/relationships" xmlns:p="http://schemas.openxmlformats.org/presentationml/2006/main">
   <p:cSld>
     <p:bg>
       <p:bgPr>
@@ -12061,7 +12190,14 @@
         <p:cNvGrpSpPr/>
         <p:nvPr/>
       </p:nvGrpSpPr>
-      <p:grpSpPr/>
+      <p:grpSpPr>
+        <a:xfrm>
+          <a:off x="0" y="0"/>
+          <a:ext cx="0" cy="0"/>
+          <a:chOff x="0" y="0"/>
+          <a:chExt cx="0" cy="0"/>
+        </a:xfrm>
+      </p:grpSpPr>
       <p:sp>
         <p:nvSpPr>
           <p:cNvPr id="2" name="TextBox 1"/>
@@ -12176,6 +12312,7 @@
           <a:lstStyle/>
           <a:p>
             <a:pPr algn="ctr"/>
+            <a:endParaRPr/>
           </a:p>
         </p:txBody>
       </p:sp>
@@ -12257,6 +12394,7 @@
           <a:lstStyle/>
           <a:p>
             <a:pPr algn="ctr"/>
+            <a:endParaRPr/>
           </a:p>
         </p:txBody>
       </p:sp>
@@ -12338,6 +12476,7 @@
           <a:lstStyle/>
           <a:p>
             <a:pPr algn="ctr"/>
+            <a:endParaRPr/>
           </a:p>
         </p:txBody>
       </p:sp>
@@ -12419,6 +12558,7 @@
           <a:lstStyle/>
           <a:p>
             <a:pPr algn="ctr"/>
+            <a:endParaRPr/>
           </a:p>
         </p:txBody>
       </p:sp>
@@ -12500,6 +12640,7 @@
           <a:lstStyle/>
           <a:p>
             <a:pPr algn="ctr"/>
+            <a:endParaRPr/>
           </a:p>
         </p:txBody>
       </p:sp>
@@ -12581,6 +12722,7 @@
           <a:lstStyle/>
           <a:p>
             <a:pPr algn="ctr"/>
+            <a:endParaRPr/>
           </a:p>
         </p:txBody>
       </p:sp>
@@ -12662,6 +12804,7 @@
           <a:lstStyle/>
           <a:p>
             <a:pPr algn="ctr"/>
+            <a:endParaRPr/>
           </a:p>
         </p:txBody>
       </p:sp>
@@ -12743,6 +12886,7 @@
           <a:lstStyle/>
           <a:p>
             <a:pPr algn="ctr"/>
+            <a:endParaRPr/>
           </a:p>
         </p:txBody>
       </p:sp>
@@ -12824,6 +12968,7 @@
           <a:lstStyle/>
           <a:p>
             <a:pPr algn="ctr"/>
+            <a:endParaRPr/>
           </a:p>
         </p:txBody>
       </p:sp>
@@ -12905,6 +13050,7 @@
           <a:lstStyle/>
           <a:p>
             <a:pPr algn="ctr"/>
+            <a:endParaRPr/>
           </a:p>
         </p:txBody>
       </p:sp>
@@ -12986,6 +13132,7 @@
           <a:lstStyle/>
           <a:p>
             <a:pPr algn="ctr"/>
+            <a:endParaRPr/>
           </a:p>
         </p:txBody>
       </p:sp>
@@ -13067,6 +13214,7 @@
           <a:lstStyle/>
           <a:p>
             <a:pPr algn="ctr"/>
+            <a:endParaRPr/>
           </a:p>
         </p:txBody>
       </p:sp>
@@ -13148,6 +13296,7 @@
           <a:lstStyle/>
           <a:p>
             <a:pPr algn="ctr"/>
+            <a:endParaRPr/>
           </a:p>
         </p:txBody>
       </p:sp>
@@ -13229,6 +13378,7 @@
           <a:lstStyle/>
           <a:p>
             <a:pPr algn="ctr"/>
+            <a:endParaRPr/>
           </a:p>
         </p:txBody>
       </p:sp>
@@ -13310,6 +13460,7 @@
           <a:lstStyle/>
           <a:p>
             <a:pPr algn="ctr"/>
+            <a:endParaRPr/>
           </a:p>
         </p:txBody>
       </p:sp>
@@ -13391,6 +13542,7 @@
           <a:lstStyle/>
           <a:p>
             <a:pPr algn="ctr"/>
+            <a:endParaRPr/>
           </a:p>
         </p:txBody>
       </p:sp>
@@ -13472,6 +13624,7 @@
           <a:lstStyle/>
           <a:p>
             <a:pPr algn="ctr"/>
+            <a:endParaRPr/>
           </a:p>
         </p:txBody>
       </p:sp>
@@ -13553,6 +13706,7 @@
           <a:lstStyle/>
           <a:p>
             <a:pPr algn="ctr"/>
+            <a:endParaRPr/>
           </a:p>
         </p:txBody>
       </p:sp>
@@ -13634,6 +13788,7 @@
           <a:lstStyle/>
           <a:p>
             <a:pPr algn="ctr"/>
+            <a:endParaRPr/>
           </a:p>
         </p:txBody>
       </p:sp>
@@ -13715,6 +13870,7 @@
           <a:lstStyle/>
           <a:p>
             <a:pPr algn="ctr"/>
+            <a:endParaRPr/>
           </a:p>
         </p:txBody>
       </p:sp>
@@ -13796,6 +13952,7 @@
           <a:lstStyle/>
           <a:p>
             <a:pPr algn="ctr"/>
+            <a:endParaRPr/>
           </a:p>
         </p:txBody>
       </p:sp>
@@ -13877,6 +14034,7 @@
           <a:lstStyle/>
           <a:p>
             <a:pPr algn="ctr"/>
+            <a:endParaRPr/>
           </a:p>
         </p:txBody>
       </p:sp>
@@ -13958,6 +14116,7 @@
           <a:lstStyle/>
           <a:p>
             <a:pPr algn="ctr"/>
+            <a:endParaRPr/>
           </a:p>
         </p:txBody>
       </p:sp>
@@ -14039,6 +14198,7 @@
           <a:lstStyle/>
           <a:p>
             <a:pPr algn="ctr"/>
+            <a:endParaRPr/>
           </a:p>
         </p:txBody>
       </p:sp>
